--- a/templates/5C Report.pptx
+++ b/templates/5C Report.pptx
@@ -9198,6 +9198,9 @@
                         <a:latin typeface="微軟正黑體"/>
                         <a:ea typeface="微軟正黑體"/>
                       </a:endParaRPr>
+                      <a:r>
+                        <a:t>{Fill in list of containment actions}</a:t>
+                      </a:r>
                     </a:p>
                   </a:txBody>
                   <a:tcPr anchor="t" marL="91440" marR="91440">
@@ -9383,6 +9386,9 @@
                         <a:latin typeface="微軟正黑體"/>
                         <a:ea typeface="微軟正黑體"/>
                       </a:endParaRPr>
+                      <a:r>
+                        <a:t>{Fill in list of root cause}</a:t>
+                      </a:r>
                     </a:p>
                   </a:txBody>
                   <a:tcPr anchor="t" marL="91440" marR="91440">

--- a/templates/5C Report.pptx
+++ b/templates/5C Report.pptx
@@ -665,7 +665,7 @@
                 <a:sym typeface="Helvetica"/>
               </a:defRPr>
             </a:lvl1pPr>
-            <a:lvl2pPr indent="0">
+            <a:lvl2pPr>
               <a:spcBef>
                 <a:spcPts val="0"/>
               </a:spcBef>
@@ -677,7 +677,7 @@
                 <a:sym typeface="Helvetica"/>
               </a:defRPr>
             </a:lvl2pPr>
-            <a:lvl3pPr indent="0">
+            <a:lvl3pPr>
               <a:spcBef>
                 <a:spcPts val="0"/>
               </a:spcBef>
@@ -689,7 +689,7 @@
                 <a:sym typeface="Helvetica"/>
               </a:defRPr>
             </a:lvl3pPr>
-            <a:lvl4pPr indent="0">
+            <a:lvl4pPr>
               <a:spcBef>
                 <a:spcPts val="0"/>
               </a:spcBef>
@@ -701,7 +701,7 @@
                 <a:sym typeface="Helvetica"/>
               </a:defRPr>
             </a:lvl4pPr>
-            <a:lvl5pPr indent="0">
+            <a:lvl5pPr>
               <a:spcBef>
                 <a:spcPts val="0"/>
               </a:spcBef>
@@ -857,7 +857,7 @@
                 <a:sym typeface="Helvetica"/>
               </a:defRPr>
             </a:lvl1pPr>
-            <a:lvl2pPr indent="0">
+            <a:lvl2pPr>
               <a:spcBef>
                 <a:spcPts val="0"/>
               </a:spcBef>
@@ -869,7 +869,7 @@
                 <a:sym typeface="Helvetica"/>
               </a:defRPr>
             </a:lvl2pPr>
-            <a:lvl3pPr indent="0">
+            <a:lvl3pPr>
               <a:spcBef>
                 <a:spcPts val="0"/>
               </a:spcBef>
@@ -881,7 +881,7 @@
                 <a:sym typeface="Helvetica"/>
               </a:defRPr>
             </a:lvl3pPr>
-            <a:lvl4pPr indent="0">
+            <a:lvl4pPr>
               <a:spcBef>
                 <a:spcPts val="0"/>
               </a:spcBef>
@@ -893,7 +893,7 @@
                 <a:sym typeface="Helvetica"/>
               </a:defRPr>
             </a:lvl4pPr>
-            <a:lvl5pPr indent="0">
+            <a:lvl5pPr>
               <a:spcBef>
                 <a:spcPts val="0"/>
               </a:spcBef>
@@ -994,8 +994,8 @@
         </p:nvSpPr>
         <p:spPr>
           <a:xfrm>
-            <a:off x="592919" y="880919"/>
-            <a:ext cx="23197683" cy="362"/>
+            <a:off x="592921" y="880919"/>
+            <a:ext cx="23197683" cy="364"/>
           </a:xfrm>
           <a:prstGeom prst="line">
             <a:avLst/>
@@ -1077,7 +1077,7 @@
                 <a:sym typeface="Helvetica"/>
               </a:defRPr>
             </a:lvl1pPr>
-            <a:lvl2pPr indent="0">
+            <a:lvl2pPr>
               <a:spcBef>
                 <a:spcPts val="0"/>
               </a:spcBef>
@@ -1089,7 +1089,7 @@
                 <a:sym typeface="Helvetica"/>
               </a:defRPr>
             </a:lvl2pPr>
-            <a:lvl3pPr indent="0">
+            <a:lvl3pPr>
               <a:spcBef>
                 <a:spcPts val="0"/>
               </a:spcBef>
@@ -1101,7 +1101,7 @@
                 <a:sym typeface="Helvetica"/>
               </a:defRPr>
             </a:lvl3pPr>
-            <a:lvl4pPr indent="0">
+            <a:lvl4pPr>
               <a:spcBef>
                 <a:spcPts val="0"/>
               </a:spcBef>
@@ -1113,7 +1113,7 @@
                 <a:sym typeface="Helvetica"/>
               </a:defRPr>
             </a:lvl4pPr>
-            <a:lvl5pPr indent="0">
+            <a:lvl5pPr>
               <a:spcBef>
                 <a:spcPts val="0"/>
               </a:spcBef>
@@ -1285,7 +1285,7 @@
                 <a:sym typeface="Helvetica"/>
               </a:defRPr>
             </a:lvl1pPr>
-            <a:lvl2pPr indent="0">
+            <a:lvl2pPr>
               <a:spcBef>
                 <a:spcPts val="0"/>
               </a:spcBef>
@@ -1297,7 +1297,7 @@
                 <a:sym typeface="Helvetica"/>
               </a:defRPr>
             </a:lvl2pPr>
-            <a:lvl3pPr indent="0">
+            <a:lvl3pPr>
               <a:spcBef>
                 <a:spcPts val="0"/>
               </a:spcBef>
@@ -1309,7 +1309,7 @@
                 <a:sym typeface="Helvetica"/>
               </a:defRPr>
             </a:lvl3pPr>
-            <a:lvl4pPr indent="0">
+            <a:lvl4pPr>
               <a:spcBef>
                 <a:spcPts val="0"/>
               </a:spcBef>
@@ -1321,7 +1321,7 @@
                 <a:sym typeface="Helvetica"/>
               </a:defRPr>
             </a:lvl4pPr>
-            <a:lvl5pPr indent="0">
+            <a:lvl5pPr>
               <a:spcBef>
                 <a:spcPts val="0"/>
               </a:spcBef>
@@ -1376,8 +1376,8 @@
         </p:nvSpPr>
         <p:spPr>
           <a:xfrm>
-            <a:off x="17248748" y="12712700"/>
-            <a:ext cx="452904" cy="460979"/>
+            <a:off x="17248749" y="12712700"/>
+            <a:ext cx="452905" cy="460979"/>
           </a:xfrm>
           <a:prstGeom prst="rect">
             <a:avLst/>
@@ -1426,8 +1426,8 @@
         </p:nvSpPr>
         <p:spPr>
           <a:xfrm>
-            <a:off x="-95402" y="13391999"/>
-            <a:ext cx="24516364" cy="456120"/>
+            <a:off x="-95404" y="13391999"/>
+            <a:ext cx="24516368" cy="456120"/>
           </a:xfrm>
           <a:prstGeom prst="rect">
             <a:avLst/>
@@ -1465,8 +1465,8 @@
         </p:nvSpPr>
         <p:spPr>
           <a:xfrm>
-            <a:off x="516959" y="1257119"/>
-            <a:ext cx="23315763" cy="362"/>
+            <a:off x="516957" y="1257119"/>
+            <a:ext cx="23315763" cy="364"/>
           </a:xfrm>
           <a:prstGeom prst="line">
             <a:avLst/>
@@ -1494,7 +1494,7 @@
         </p:nvGraphicFramePr>
         <p:xfrm>
           <a:off x="57240" y="13373278"/>
-          <a:ext cx="35204760" cy="512642"/>
+          <a:ext cx="35204760" cy="512644"/>
         </p:xfrm>
         <a:graphic xmlns:a="http://schemas.openxmlformats.org/drawingml/2006/main">
           <a:graphicData uri="http://schemas.openxmlformats.org/drawingml/2006/table">
@@ -1678,7 +1678,7 @@
                 <a:sym typeface="Helvetica"/>
               </a:defRPr>
             </a:lvl1pPr>
-            <a:lvl2pPr indent="0">
+            <a:lvl2pPr>
               <a:spcBef>
                 <a:spcPts val="0"/>
               </a:spcBef>
@@ -1690,7 +1690,7 @@
                 <a:sym typeface="Helvetica"/>
               </a:defRPr>
             </a:lvl2pPr>
-            <a:lvl3pPr indent="0">
+            <a:lvl3pPr>
               <a:spcBef>
                 <a:spcPts val="0"/>
               </a:spcBef>
@@ -1702,7 +1702,7 @@
                 <a:sym typeface="Helvetica"/>
               </a:defRPr>
             </a:lvl3pPr>
-            <a:lvl4pPr indent="0">
+            <a:lvl4pPr>
               <a:spcBef>
                 <a:spcPts val="0"/>
               </a:spcBef>
@@ -1714,7 +1714,7 @@
                 <a:sym typeface="Helvetica"/>
               </a:defRPr>
             </a:lvl4pPr>
-            <a:lvl5pPr indent="0">
+            <a:lvl5pPr>
               <a:spcBef>
                 <a:spcPts val="0"/>
               </a:spcBef>
@@ -1827,8 +1827,8 @@
         </p:nvSpPr>
         <p:spPr>
           <a:xfrm>
-            <a:off x="-95402" y="13391999"/>
-            <a:ext cx="24516364" cy="456120"/>
+            <a:off x="-95404" y="13391999"/>
+            <a:ext cx="24516368" cy="456120"/>
           </a:xfrm>
           <a:prstGeom prst="rect">
             <a:avLst/>
@@ -1866,8 +1866,8 @@
         </p:nvSpPr>
         <p:spPr>
           <a:xfrm>
-            <a:off x="516959" y="1257119"/>
-            <a:ext cx="23315763" cy="362"/>
+            <a:off x="516957" y="1257119"/>
+            <a:ext cx="23315763" cy="364"/>
           </a:xfrm>
           <a:prstGeom prst="line">
             <a:avLst/>
@@ -1895,7 +1895,7 @@
         </p:nvGraphicFramePr>
         <p:xfrm>
           <a:off x="57240" y="13373278"/>
-          <a:ext cx="24275162" cy="353522"/>
+          <a:ext cx="24275162" cy="353524"/>
         </p:xfrm>
         <a:graphic xmlns:a="http://schemas.openxmlformats.org/drawingml/2006/main">
           <a:graphicData uri="http://schemas.openxmlformats.org/drawingml/2006/table">
@@ -2088,7 +2088,7 @@
                 <a:sym typeface="Helvetica"/>
               </a:defRPr>
             </a:lvl1pPr>
-            <a:lvl2pPr indent="0">
+            <a:lvl2pPr>
               <a:spcBef>
                 <a:spcPts val="0"/>
               </a:spcBef>
@@ -2100,7 +2100,7 @@
                 <a:sym typeface="Helvetica"/>
               </a:defRPr>
             </a:lvl2pPr>
-            <a:lvl3pPr indent="0">
+            <a:lvl3pPr>
               <a:spcBef>
                 <a:spcPts val="0"/>
               </a:spcBef>
@@ -2112,7 +2112,7 @@
                 <a:sym typeface="Helvetica"/>
               </a:defRPr>
             </a:lvl3pPr>
-            <a:lvl4pPr indent="0">
+            <a:lvl4pPr>
               <a:spcBef>
                 <a:spcPts val="0"/>
               </a:spcBef>
@@ -2124,7 +2124,7 @@
                 <a:sym typeface="Helvetica"/>
               </a:defRPr>
             </a:lvl4pPr>
-            <a:lvl5pPr indent="0">
+            <a:lvl5pPr>
               <a:spcBef>
                 <a:spcPts val="0"/>
               </a:spcBef>
@@ -2179,7 +2179,7 @@
         </p:nvSpPr>
         <p:spPr>
           <a:xfrm>
-            <a:off x="12407620" y="13389697"/>
+            <a:off x="12407620" y="13389698"/>
             <a:ext cx="362800" cy="363384"/>
           </a:xfrm>
           <a:prstGeom prst="rect">
@@ -2238,7 +2238,7 @@
         <p:spPr>
           <a:xfrm>
             <a:off x="-88921" y="13398478"/>
-            <a:ext cx="27075244" cy="468722"/>
+            <a:ext cx="27075244" cy="468724"/>
           </a:xfrm>
           <a:prstGeom prst="rect">
             <a:avLst/>
@@ -2273,8 +2273,8 @@
         </p:nvSpPr>
         <p:spPr>
           <a:xfrm>
-            <a:off x="516959" y="1244518"/>
-            <a:ext cx="23315763" cy="362"/>
+            <a:off x="516957" y="1244518"/>
+            <a:ext cx="23315763" cy="364"/>
           </a:xfrm>
           <a:prstGeom prst="line">
             <a:avLst/>
@@ -2302,7 +2302,7 @@
         </p:nvGraphicFramePr>
         <p:xfrm>
           <a:off x="76320" y="13347720"/>
-          <a:ext cx="24291361" cy="365042"/>
+          <a:ext cx="24291361" cy="365044"/>
         </p:xfrm>
         <a:graphic xmlns:a="http://schemas.openxmlformats.org/drawingml/2006/main">
           <a:graphicData uri="http://schemas.openxmlformats.org/drawingml/2006/table">
@@ -2486,7 +2486,7 @@
                 <a:sym typeface="Helvetica"/>
               </a:defRPr>
             </a:lvl1pPr>
-            <a:lvl2pPr indent="0">
+            <a:lvl2pPr>
               <a:spcBef>
                 <a:spcPts val="0"/>
               </a:spcBef>
@@ -2498,7 +2498,7 @@
                 <a:sym typeface="Helvetica"/>
               </a:defRPr>
             </a:lvl2pPr>
-            <a:lvl3pPr indent="0">
+            <a:lvl3pPr>
               <a:spcBef>
                 <a:spcPts val="0"/>
               </a:spcBef>
@@ -2510,7 +2510,7 @@
                 <a:sym typeface="Helvetica"/>
               </a:defRPr>
             </a:lvl3pPr>
-            <a:lvl4pPr indent="0">
+            <a:lvl4pPr>
               <a:spcBef>
                 <a:spcPts val="0"/>
               </a:spcBef>
@@ -2522,7 +2522,7 @@
                 <a:sym typeface="Helvetica"/>
               </a:defRPr>
             </a:lvl4pPr>
-            <a:lvl5pPr indent="0">
+            <a:lvl5pPr>
               <a:spcBef>
                 <a:spcPts val="0"/>
               </a:spcBef>
@@ -2635,8 +2635,8 @@
         </p:nvSpPr>
         <p:spPr>
           <a:xfrm>
-            <a:off x="-95402" y="13391999"/>
-            <a:ext cx="24516364" cy="456120"/>
+            <a:off x="-95404" y="13391999"/>
+            <a:ext cx="24516368" cy="456120"/>
           </a:xfrm>
           <a:prstGeom prst="rect">
             <a:avLst/>
@@ -2674,8 +2674,8 @@
         </p:nvSpPr>
         <p:spPr>
           <a:xfrm>
-            <a:off x="516959" y="1257119"/>
-            <a:ext cx="23315763" cy="362"/>
+            <a:off x="516957" y="1257119"/>
+            <a:ext cx="23315763" cy="364"/>
           </a:xfrm>
           <a:prstGeom prst="line">
             <a:avLst/>
@@ -2703,7 +2703,7 @@
         </p:nvGraphicFramePr>
         <p:xfrm>
           <a:off x="57240" y="13373278"/>
-          <a:ext cx="24275162" cy="349202"/>
+          <a:ext cx="24275162" cy="349204"/>
         </p:xfrm>
         <a:graphic xmlns:a="http://schemas.openxmlformats.org/drawingml/2006/main">
           <a:graphicData uri="http://schemas.openxmlformats.org/drawingml/2006/table">
@@ -2887,7 +2887,7 @@
                 <a:sym typeface="Helvetica"/>
               </a:defRPr>
             </a:lvl1pPr>
-            <a:lvl2pPr indent="0">
+            <a:lvl2pPr>
               <a:spcBef>
                 <a:spcPts val="0"/>
               </a:spcBef>
@@ -2899,7 +2899,7 @@
                 <a:sym typeface="Helvetica"/>
               </a:defRPr>
             </a:lvl2pPr>
-            <a:lvl3pPr indent="0">
+            <a:lvl3pPr>
               <a:spcBef>
                 <a:spcPts val="0"/>
               </a:spcBef>
@@ -2911,7 +2911,7 @@
                 <a:sym typeface="Helvetica"/>
               </a:defRPr>
             </a:lvl3pPr>
-            <a:lvl4pPr indent="0">
+            <a:lvl4pPr>
               <a:spcBef>
                 <a:spcPts val="0"/>
               </a:spcBef>
@@ -2923,7 +2923,7 @@
                 <a:sym typeface="Helvetica"/>
               </a:defRPr>
             </a:lvl4pPr>
-            <a:lvl5pPr indent="0">
+            <a:lvl5pPr>
               <a:spcBef>
                 <a:spcPts val="0"/>
               </a:spcBef>
@@ -2978,7 +2978,7 @@
         </p:nvSpPr>
         <p:spPr>
           <a:xfrm>
-            <a:off x="12407620" y="13389697"/>
+            <a:off x="12407620" y="13389698"/>
             <a:ext cx="362800" cy="363384"/>
           </a:xfrm>
           <a:prstGeom prst="rect">
@@ -3095,7 +3095,7 @@
         <p:spPr>
           <a:xfrm>
             <a:off x="943560" y="877678"/>
-            <a:ext cx="1319401" cy="1319402"/>
+            <a:ext cx="1319401" cy="1319404"/>
           </a:xfrm>
           <a:prstGeom prst="rect">
             <a:avLst/>
@@ -3168,7 +3168,7 @@
                 <a:sym typeface="Helvetica"/>
               </a:defRPr>
             </a:lvl1pPr>
-            <a:lvl2pPr indent="0">
+            <a:lvl2pPr>
               <a:spcBef>
                 <a:spcPts val="0"/>
               </a:spcBef>
@@ -3180,7 +3180,7 @@
                 <a:sym typeface="Helvetica"/>
               </a:defRPr>
             </a:lvl2pPr>
-            <a:lvl3pPr indent="0">
+            <a:lvl3pPr>
               <a:spcBef>
                 <a:spcPts val="0"/>
               </a:spcBef>
@@ -3192,7 +3192,7 @@
                 <a:sym typeface="Helvetica"/>
               </a:defRPr>
             </a:lvl3pPr>
-            <a:lvl4pPr indent="0">
+            <a:lvl4pPr>
               <a:spcBef>
                 <a:spcPts val="0"/>
               </a:spcBef>
@@ -3204,7 +3204,7 @@
                 <a:sym typeface="Helvetica"/>
               </a:defRPr>
             </a:lvl4pPr>
-            <a:lvl5pPr indent="0">
+            <a:lvl5pPr>
               <a:spcBef>
                 <a:spcPts val="0"/>
               </a:spcBef>
@@ -3472,7 +3472,7 @@
                 <a:sym typeface="Helvetica"/>
               </a:defRPr>
             </a:lvl1pPr>
-            <a:lvl2pPr indent="0">
+            <a:lvl2pPr>
               <a:spcBef>
                 <a:spcPts val="0"/>
               </a:spcBef>
@@ -3484,7 +3484,7 @@
                 <a:sym typeface="Helvetica"/>
               </a:defRPr>
             </a:lvl2pPr>
-            <a:lvl3pPr indent="0">
+            <a:lvl3pPr>
               <a:spcBef>
                 <a:spcPts val="0"/>
               </a:spcBef>
@@ -3496,7 +3496,7 @@
                 <a:sym typeface="Helvetica"/>
               </a:defRPr>
             </a:lvl3pPr>
-            <a:lvl4pPr indent="0">
+            <a:lvl4pPr>
               <a:spcBef>
                 <a:spcPts val="0"/>
               </a:spcBef>
@@ -3508,7 +3508,7 @@
                 <a:sym typeface="Helvetica"/>
               </a:defRPr>
             </a:lvl4pPr>
-            <a:lvl5pPr indent="0">
+            <a:lvl5pPr>
               <a:spcBef>
                 <a:spcPts val="0"/>
               </a:spcBef>
@@ -3680,7 +3680,7 @@
                 <a:sym typeface="Helvetica"/>
               </a:defRPr>
             </a:lvl1pPr>
-            <a:lvl2pPr indent="0">
+            <a:lvl2pPr>
               <a:spcBef>
                 <a:spcPts val="0"/>
               </a:spcBef>
@@ -3692,7 +3692,7 @@
                 <a:sym typeface="Helvetica"/>
               </a:defRPr>
             </a:lvl2pPr>
-            <a:lvl3pPr indent="0">
+            <a:lvl3pPr>
               <a:spcBef>
                 <a:spcPts val="0"/>
               </a:spcBef>
@@ -3704,7 +3704,7 @@
                 <a:sym typeface="Helvetica"/>
               </a:defRPr>
             </a:lvl3pPr>
-            <a:lvl4pPr indent="0">
+            <a:lvl4pPr>
               <a:spcBef>
                 <a:spcPts val="0"/>
               </a:spcBef>
@@ -3716,7 +3716,7 @@
                 <a:sym typeface="Helvetica"/>
               </a:defRPr>
             </a:lvl4pPr>
-            <a:lvl5pPr indent="0">
+            <a:lvl5pPr>
               <a:spcBef>
                 <a:spcPts val="0"/>
               </a:spcBef>
@@ -3872,7 +3872,7 @@
                 <a:sym typeface="Helvetica"/>
               </a:defRPr>
             </a:lvl1pPr>
-            <a:lvl2pPr indent="0">
+            <a:lvl2pPr>
               <a:spcBef>
                 <a:spcPts val="0"/>
               </a:spcBef>
@@ -3884,7 +3884,7 @@
                 <a:sym typeface="Helvetica"/>
               </a:defRPr>
             </a:lvl2pPr>
-            <a:lvl3pPr indent="0">
+            <a:lvl3pPr>
               <a:spcBef>
                 <a:spcPts val="0"/>
               </a:spcBef>
@@ -3896,7 +3896,7 @@
                 <a:sym typeface="Helvetica"/>
               </a:defRPr>
             </a:lvl3pPr>
-            <a:lvl4pPr indent="0">
+            <a:lvl4pPr>
               <a:spcBef>
                 <a:spcPts val="0"/>
               </a:spcBef>
@@ -3908,7 +3908,7 @@
                 <a:sym typeface="Helvetica"/>
               </a:defRPr>
             </a:lvl4pPr>
-            <a:lvl5pPr indent="0">
+            <a:lvl5pPr>
               <a:spcBef>
                 <a:spcPts val="0"/>
               </a:spcBef>
@@ -4064,7 +4064,7 @@
                 <a:sym typeface="Helvetica"/>
               </a:defRPr>
             </a:lvl1pPr>
-            <a:lvl2pPr indent="0">
+            <a:lvl2pPr>
               <a:spcBef>
                 <a:spcPts val="0"/>
               </a:spcBef>
@@ -4076,7 +4076,7 @@
                 <a:sym typeface="Helvetica"/>
               </a:defRPr>
             </a:lvl2pPr>
-            <a:lvl3pPr indent="0">
+            <a:lvl3pPr>
               <a:spcBef>
                 <a:spcPts val="0"/>
               </a:spcBef>
@@ -4088,7 +4088,7 @@
                 <a:sym typeface="Helvetica"/>
               </a:defRPr>
             </a:lvl3pPr>
-            <a:lvl4pPr indent="0">
+            <a:lvl4pPr>
               <a:spcBef>
                 <a:spcPts val="0"/>
               </a:spcBef>
@@ -4100,7 +4100,7 @@
                 <a:sym typeface="Helvetica"/>
               </a:defRPr>
             </a:lvl4pPr>
-            <a:lvl5pPr indent="0">
+            <a:lvl5pPr>
               <a:spcBef>
                 <a:spcPts val="0"/>
               </a:spcBef>
@@ -4249,7 +4249,7 @@
         <p:spPr>
           <a:xfrm>
             <a:off x="1201319" y="11859838"/>
-            <a:ext cx="21970083" cy="635762"/>
+            <a:ext cx="21970083" cy="635764"/>
           </a:xfrm>
           <a:prstGeom prst="rect">
             <a:avLst/>
@@ -4626,7 +4626,7 @@
           <a:sym typeface="Arial"/>
         </a:defRPr>
       </a:lvl1pPr>
-      <a:lvl2pPr marL="0" marR="0" indent="539999" algn="l" defTabSz="914400" rtl="0" latinLnBrk="0">
+      <a:lvl2pPr marL="0" marR="0" indent="0" algn="l" defTabSz="914400" rtl="0" latinLnBrk="0">
         <a:lnSpc>
           <a:spcPct val="100000"/>
         </a:lnSpc>
@@ -4654,7 +4654,7 @@
           <a:sym typeface="Arial"/>
         </a:defRPr>
       </a:lvl2pPr>
-      <a:lvl3pPr marL="0" marR="0" indent="1007998" algn="l" defTabSz="914400" rtl="0" latinLnBrk="0">
+      <a:lvl3pPr marL="0" marR="0" indent="0" algn="l" defTabSz="914400" rtl="0" latinLnBrk="0">
         <a:lnSpc>
           <a:spcPct val="100000"/>
         </a:lnSpc>
@@ -4682,7 +4682,7 @@
           <a:sym typeface="Arial"/>
         </a:defRPr>
       </a:lvl3pPr>
-      <a:lvl4pPr marL="0" marR="0" indent="1511999" algn="l" defTabSz="914400" rtl="0" latinLnBrk="0">
+      <a:lvl4pPr marL="0" marR="0" indent="0" algn="l" defTabSz="914400" rtl="0" latinLnBrk="0">
         <a:lnSpc>
           <a:spcPct val="100000"/>
         </a:lnSpc>
@@ -4710,7 +4710,7 @@
           <a:sym typeface="Arial"/>
         </a:defRPr>
       </a:lvl4pPr>
-      <a:lvl5pPr marL="0" marR="0" indent="1943999" algn="l" defTabSz="914400" rtl="0" latinLnBrk="0">
+      <a:lvl5pPr marL="0" marR="0" indent="0" algn="l" defTabSz="914400" rtl="0" latinLnBrk="0">
         <a:lnSpc>
           <a:spcPct val="100000"/>
         </a:lnSpc>
@@ -4738,7 +4738,7 @@
           <a:sym typeface="Arial"/>
         </a:defRPr>
       </a:lvl5pPr>
-      <a:lvl6pPr marL="0" marR="0" indent="2375999" algn="l" defTabSz="914400" rtl="0" latinLnBrk="0">
+      <a:lvl6pPr marL="0" marR="0" indent="0" algn="l" defTabSz="914400" rtl="0" latinLnBrk="0">
         <a:lnSpc>
           <a:spcPct val="100000"/>
         </a:lnSpc>
@@ -4766,7 +4766,7 @@
           <a:sym typeface="Arial"/>
         </a:defRPr>
       </a:lvl6pPr>
-      <a:lvl7pPr marL="0" marR="0" indent="2807999" algn="l" defTabSz="914400" rtl="0" latinLnBrk="0">
+      <a:lvl7pPr marL="0" marR="0" indent="0" algn="l" defTabSz="914400" rtl="0" latinLnBrk="0">
         <a:lnSpc>
           <a:spcPct val="100000"/>
         </a:lnSpc>
@@ -5116,8 +5116,8 @@
         </p:nvSpPr>
         <p:spPr>
           <a:xfrm>
-            <a:off x="6506998" y="431999"/>
-            <a:ext cx="11295723" cy="558721"/>
+            <a:off x="6506997" y="431999"/>
+            <a:ext cx="11295726" cy="558721"/>
           </a:xfrm>
           <a:prstGeom prst="rect">
             <a:avLst/>
@@ -5307,10 +5307,6 @@
               </a:tr>
               <a:tr h="895319">
                 <a:tc vMerge="1">
-                  <a:txBody>
-                    <a:bodyPr/>
-                    <a:p/>
-                  </a:txBody>
                   <a:tcPr/>
                 </a:tc>
                 <a:tc>
@@ -5402,10 +5398,6 @@
               </a:tr>
               <a:tr h="895319">
                 <a:tc vMerge="1">
-                  <a:txBody>
-                    <a:bodyPr/>
-                    <a:p/>
-                  </a:txBody>
                   <a:tcPr/>
                 </a:tc>
                 <a:tc>
@@ -5746,10 +5738,6 @@
               </a:tr>
               <a:tr h="1263240">
                 <a:tc vMerge="1">
-                  <a:txBody>
-                    <a:bodyPr/>
-                    <a:p/>
-                  </a:txBody>
                   <a:tcPr/>
                 </a:tc>
                 <a:tc>
@@ -5972,10 +5960,6 @@
               </a:tr>
               <a:tr h="1346400">
                 <a:tc vMerge="1">
-                  <a:txBody>
-                    <a:bodyPr/>
-                    <a:p/>
-                  </a:txBody>
                   <a:tcPr/>
                 </a:tc>
                 <a:tc>
@@ -6198,10 +6182,6 @@
               </a:tr>
               <a:tr h="1313280">
                 <a:tc vMerge="1">
-                  <a:txBody>
-                    <a:bodyPr/>
-                    <a:p/>
-                  </a:txBody>
                   <a:tcPr/>
                 </a:tc>
                 <a:tc>
@@ -6329,8 +6309,8 @@
         </p:nvSpPr>
         <p:spPr>
           <a:xfrm>
-            <a:off x="1669305" y="501624"/>
-            <a:ext cx="1640841" cy="612139"/>
+            <a:off x="445208" y="468980"/>
+            <a:ext cx="1640841" cy="612137"/>
           </a:xfrm>
           <a:prstGeom prst="rect">
             <a:avLst/>
@@ -6374,8 +6354,8 @@
         </p:nvSpPr>
         <p:spPr>
           <a:xfrm>
-            <a:off x="452118" y="7239000"/>
-            <a:ext cx="9535164" cy="277519"/>
+            <a:off x="647699" y="1739899"/>
+            <a:ext cx="9535167" cy="277517"/>
           </a:xfrm>
           <a:prstGeom prst="rect">
             <a:avLst/>
@@ -6419,8 +6399,8 @@
         </p:nvSpPr>
         <p:spPr>
           <a:xfrm>
-            <a:off x="10828019" y="7239000"/>
-            <a:ext cx="11694167" cy="277519"/>
+            <a:off x="11671300" y="1739899"/>
+            <a:ext cx="11694167" cy="277517"/>
           </a:xfrm>
           <a:prstGeom prst="rect">
             <a:avLst/>
